--- a/Poster/Poster.pptx
+++ b/Poster/Poster.pptx
@@ -1869,7 +1869,7 @@
         <p:spPr>
           <a:xfrm>
             <a:off x="678097" y="4799016"/>
-            <a:ext cx="6129103" cy="1732426"/>
+            <a:ext cx="6129103" cy="1738032"/>
           </a:xfrm>
           <a:ln>
             <a:solidFill>
@@ -2477,7 +2477,7 @@
         </p:nvSpPr>
         <p:spPr>
           <a:xfrm>
-            <a:off x="7416803" y="4793410"/>
+            <a:off x="7416800" y="4799016"/>
             <a:ext cx="6127234" cy="1738032"/>
           </a:xfrm>
           <a:prstGeom prst="rect">
@@ -2737,6 +2737,414 @@
           </a:prstGeom>
         </p:spPr>
       </p:pic>
+      <p:sp>
+        <p:nvSpPr>
+          <p:cNvPr id="5" name="Text Placeholder 10">
+            <a:extLst>
+              <a:ext uri="{FF2B5EF4-FFF2-40B4-BE49-F238E27FC236}">
+                <a16:creationId xmlns:a16="http://schemas.microsoft.com/office/drawing/2014/main" id="{63AF02B7-8D7C-B311-F7FC-3B22594855D4}"/>
+              </a:ext>
+            </a:extLst>
+          </p:cNvPr>
+          <p:cNvSpPr txBox="1">
+            <a:spLocks/>
+          </p:cNvSpPr>
+          <p:nvPr/>
+        </p:nvSpPr>
+        <p:spPr>
+          <a:xfrm>
+            <a:off x="9369028" y="9389922"/>
+            <a:ext cx="4175008" cy="338132"/>
+          </a:xfrm>
+          <a:prstGeom prst="round2SameRect">
+            <a:avLst/>
+          </a:prstGeom>
+          <a:solidFill>
+            <a:schemeClr val="tx2">
+              <a:lumMod val="60000"/>
+              <a:lumOff val="40000"/>
+            </a:schemeClr>
+          </a:solidFill>
+          <a:ln w="19050">
+            <a:solidFill>
+              <a:srgbClr val="00283C"/>
+            </a:solidFill>
+          </a:ln>
+        </p:spPr>
+        <p:txBody>
+          <a:bodyPr vert="horz" lIns="360000" tIns="0" rIns="360000" bIns="0" rtlCol="0" anchor="ctr" anchorCtr="0">
+            <a:noAutofit/>
+          </a:bodyPr>
+          <a:lstStyle>
+            <a:lvl1pPr marL="0" indent="0" algn="l" defTabSz="202867" rtl="0" eaLnBrk="1" latinLnBrk="0" hangingPunct="1">
+              <a:lnSpc>
+                <a:spcPct val="100000"/>
+              </a:lnSpc>
+              <a:spcBef>
+                <a:spcPts val="0"/>
+              </a:spcBef>
+              <a:spcAft>
+                <a:spcPts val="564"/>
+              </a:spcAft>
+              <a:buFontTx/>
+              <a:buNone/>
+              <a:tabLst>
+                <a:tab pos="202867" algn="l"/>
+              </a:tabLst>
+              <a:defRPr sz="1503" b="1" kern="1200" cap="all" baseline="0">
+                <a:solidFill>
+                  <a:schemeClr val="bg1"/>
+                </a:solidFill>
+                <a:latin typeface="Arial" pitchFamily="34" charset="0"/>
+                <a:ea typeface="+mn-ea"/>
+                <a:cs typeface="Arial" pitchFamily="34" charset="0"/>
+              </a:defRPr>
+            </a:lvl1pPr>
+            <a:lvl2pPr marL="0" indent="0" algn="l" defTabSz="202867" rtl="0" eaLnBrk="1" latinLnBrk="0" hangingPunct="1">
+              <a:spcBef>
+                <a:spcPts val="0"/>
+              </a:spcBef>
+              <a:buFont typeface="Arial" pitchFamily="34" charset="0"/>
+              <a:buNone/>
+              <a:tabLst>
+                <a:tab pos="202867" algn="l"/>
+              </a:tabLst>
+              <a:defRPr sz="1503" kern="1200">
+                <a:solidFill>
+                  <a:schemeClr val="tx1"/>
+                </a:solidFill>
+                <a:latin typeface="Arial" pitchFamily="34" charset="0"/>
+                <a:ea typeface="+mn-ea"/>
+                <a:cs typeface="Arial" pitchFamily="34" charset="0"/>
+              </a:defRPr>
+            </a:lvl2pPr>
+            <a:lvl3pPr marL="202867" indent="-202867" algn="l" defTabSz="202867" rtl="0" eaLnBrk="1" latinLnBrk="0" hangingPunct="1">
+              <a:spcBef>
+                <a:spcPts val="0"/>
+              </a:spcBef>
+              <a:buFont typeface="Arial" pitchFamily="34" charset="0"/>
+              <a:buChar char="•"/>
+              <a:tabLst>
+                <a:tab pos="202867" algn="l"/>
+              </a:tabLst>
+              <a:defRPr sz="1503" kern="1200">
+                <a:solidFill>
+                  <a:schemeClr val="tx1"/>
+                </a:solidFill>
+                <a:latin typeface="Arial" pitchFamily="34" charset="0"/>
+                <a:ea typeface="+mn-ea"/>
+                <a:cs typeface="Arial" pitchFamily="34" charset="0"/>
+              </a:defRPr>
+            </a:lvl3pPr>
+            <a:lvl4pPr marL="405734" indent="-202867" algn="l" defTabSz="202867" rtl="0" eaLnBrk="1" latinLnBrk="0" hangingPunct="1">
+              <a:spcBef>
+                <a:spcPts val="0"/>
+              </a:spcBef>
+              <a:buFont typeface="Arial" pitchFamily="34" charset="0"/>
+              <a:buChar char="–"/>
+              <a:tabLst>
+                <a:tab pos="202867" algn="l"/>
+              </a:tabLst>
+              <a:defRPr sz="1503" kern="1200">
+                <a:solidFill>
+                  <a:schemeClr val="tx1"/>
+                </a:solidFill>
+                <a:latin typeface="Arial" pitchFamily="34" charset="0"/>
+                <a:ea typeface="+mn-ea"/>
+                <a:cs typeface="Arial" pitchFamily="34" charset="0"/>
+              </a:defRPr>
+            </a:lvl4pPr>
+            <a:lvl5pPr marL="608602" indent="-202867" algn="l" defTabSz="202867" rtl="0" eaLnBrk="1" latinLnBrk="0" hangingPunct="1">
+              <a:spcBef>
+                <a:spcPts val="0"/>
+              </a:spcBef>
+              <a:buFont typeface="Arial" pitchFamily="34" charset="0"/>
+              <a:buChar char="»"/>
+              <a:tabLst>
+                <a:tab pos="202867" algn="l"/>
+              </a:tabLst>
+              <a:defRPr sz="1503" kern="1200">
+                <a:solidFill>
+                  <a:schemeClr val="tx1"/>
+                </a:solidFill>
+                <a:latin typeface="Arial" pitchFamily="34" charset="0"/>
+                <a:ea typeface="+mn-ea"/>
+                <a:cs typeface="Arial" pitchFamily="34" charset="0"/>
+              </a:defRPr>
+            </a:lvl5pPr>
+            <a:lvl6pPr marL="5393442" indent="-490313" algn="l" defTabSz="1961252" rtl="0" eaLnBrk="1" latinLnBrk="0" hangingPunct="1">
+              <a:spcBef>
+                <a:spcPct val="20000"/>
+              </a:spcBef>
+              <a:buFont typeface="Arial" pitchFamily="34" charset="0"/>
+              <a:buChar char="•"/>
+              <a:defRPr sz="4273" kern="1200">
+                <a:solidFill>
+                  <a:schemeClr val="tx1"/>
+                </a:solidFill>
+                <a:latin typeface="+mn-lt"/>
+                <a:ea typeface="+mn-ea"/>
+                <a:cs typeface="+mn-cs"/>
+              </a:defRPr>
+            </a:lvl6pPr>
+            <a:lvl7pPr marL="6374068" indent="-490313" algn="l" defTabSz="1961252" rtl="0" eaLnBrk="1" latinLnBrk="0" hangingPunct="1">
+              <a:spcBef>
+                <a:spcPct val="20000"/>
+              </a:spcBef>
+              <a:buFont typeface="Arial" pitchFamily="34" charset="0"/>
+              <a:buChar char="•"/>
+              <a:defRPr sz="4273" kern="1200">
+                <a:solidFill>
+                  <a:schemeClr val="tx1"/>
+                </a:solidFill>
+                <a:latin typeface="+mn-lt"/>
+                <a:ea typeface="+mn-ea"/>
+                <a:cs typeface="+mn-cs"/>
+              </a:defRPr>
+            </a:lvl7pPr>
+            <a:lvl8pPr marL="7354694" indent="-490313" algn="l" defTabSz="1961252" rtl="0" eaLnBrk="1" latinLnBrk="0" hangingPunct="1">
+              <a:spcBef>
+                <a:spcPct val="20000"/>
+              </a:spcBef>
+              <a:buFont typeface="Arial" pitchFamily="34" charset="0"/>
+              <a:buChar char="•"/>
+              <a:defRPr sz="4273" kern="1200">
+                <a:solidFill>
+                  <a:schemeClr val="tx1"/>
+                </a:solidFill>
+                <a:latin typeface="+mn-lt"/>
+                <a:ea typeface="+mn-ea"/>
+                <a:cs typeface="+mn-cs"/>
+              </a:defRPr>
+            </a:lvl8pPr>
+            <a:lvl9pPr marL="8335320" indent="-490313" algn="l" defTabSz="1961252" rtl="0" eaLnBrk="1" latinLnBrk="0" hangingPunct="1">
+              <a:spcBef>
+                <a:spcPct val="20000"/>
+              </a:spcBef>
+              <a:buFont typeface="Arial" pitchFamily="34" charset="0"/>
+              <a:buChar char="•"/>
+              <a:defRPr sz="4273" kern="1200">
+                <a:solidFill>
+                  <a:schemeClr val="tx1"/>
+                </a:solidFill>
+                <a:latin typeface="+mn-lt"/>
+                <a:ea typeface="+mn-ea"/>
+                <a:cs typeface="+mn-cs"/>
+              </a:defRPr>
+            </a:lvl9pPr>
+          </a:lstStyle>
+          <a:p>
+            <a:r>
+              <a:rPr lang="nl-BE" b="0" cap="none" dirty="0"/>
+              <a:t>EVE-NG  </a:t>
+            </a:r>
+          </a:p>
+        </p:txBody>
+      </p:sp>
+      <p:sp>
+        <p:nvSpPr>
+          <p:cNvPr id="6" name="Text Placeholder 9">
+            <a:extLst>
+              <a:ext uri="{FF2B5EF4-FFF2-40B4-BE49-F238E27FC236}">
+                <a16:creationId xmlns:a16="http://schemas.microsoft.com/office/drawing/2014/main" id="{8F44D8A6-BCB4-CB6E-EB88-86CB9BDC0341}"/>
+              </a:ext>
+            </a:extLst>
+          </p:cNvPr>
+          <p:cNvSpPr txBox="1">
+            <a:spLocks/>
+          </p:cNvSpPr>
+          <p:nvPr/>
+        </p:nvSpPr>
+        <p:spPr>
+          <a:xfrm>
+            <a:off x="9369028" y="9728054"/>
+            <a:ext cx="4175008" cy="1969313"/>
+          </a:xfrm>
+          <a:prstGeom prst="rect">
+            <a:avLst/>
+          </a:prstGeom>
+          <a:ln w="19050">
+            <a:solidFill>
+              <a:srgbClr val="00283C"/>
+            </a:solidFill>
+          </a:ln>
+        </p:spPr>
+        <p:txBody>
+          <a:bodyPr vert="horz" wrap="square" lIns="360000" tIns="288000" rIns="360000" bIns="288000" rtlCol="0">
+            <a:spAutoFit/>
+          </a:bodyPr>
+          <a:lstStyle>
+            <a:lvl1pPr marL="0" indent="0" algn="l" defTabSz="202867" rtl="0" eaLnBrk="1" latinLnBrk="0" hangingPunct="1">
+              <a:spcBef>
+                <a:spcPts val="0"/>
+              </a:spcBef>
+              <a:spcAft>
+                <a:spcPts val="564"/>
+              </a:spcAft>
+              <a:buFont typeface="Arial" pitchFamily="34" charset="0"/>
+              <a:buNone/>
+              <a:tabLst>
+                <a:tab pos="202867" algn="l"/>
+              </a:tabLst>
+              <a:defRPr sz="1503" b="1" kern="1200" cap="all" baseline="0">
+                <a:solidFill>
+                  <a:srgbClr val="FA6432"/>
+                </a:solidFill>
+                <a:latin typeface="Arial" pitchFamily="34" charset="0"/>
+                <a:ea typeface="+mn-ea"/>
+                <a:cs typeface="Arial" pitchFamily="34" charset="0"/>
+              </a:defRPr>
+            </a:lvl1pPr>
+            <a:lvl2pPr marL="0" indent="-202867" algn="l" defTabSz="202867" rtl="0" eaLnBrk="1" latinLnBrk="0" hangingPunct="1">
+              <a:spcBef>
+                <a:spcPts val="0"/>
+              </a:spcBef>
+              <a:buFont typeface="Arial" pitchFamily="34" charset="0"/>
+              <a:buNone/>
+              <a:tabLst>
+                <a:tab pos="202867" algn="l"/>
+              </a:tabLst>
+              <a:defRPr lang="nl-NL" sz="1503" kern="1200" dirty="0" smtClean="0">
+                <a:solidFill>
+                  <a:schemeClr val="tx1"/>
+                </a:solidFill>
+                <a:latin typeface="Arial" pitchFamily="34" charset="0"/>
+                <a:ea typeface="+mn-ea"/>
+                <a:cs typeface="Arial" pitchFamily="34" charset="0"/>
+              </a:defRPr>
+            </a:lvl2pPr>
+            <a:lvl3pPr marL="202867" indent="-202867" algn="l" defTabSz="202867" rtl="0" eaLnBrk="1" latinLnBrk="0" hangingPunct="1">
+              <a:spcBef>
+                <a:spcPts val="0"/>
+              </a:spcBef>
+              <a:buFont typeface="Arial" pitchFamily="34" charset="0"/>
+              <a:buChar char="•"/>
+              <a:tabLst>
+                <a:tab pos="202867" algn="l"/>
+              </a:tabLst>
+              <a:defRPr sz="1503" kern="1200">
+                <a:solidFill>
+                  <a:schemeClr val="tx1"/>
+                </a:solidFill>
+                <a:latin typeface="Arial" pitchFamily="34" charset="0"/>
+                <a:ea typeface="+mn-ea"/>
+                <a:cs typeface="Arial" pitchFamily="34" charset="0"/>
+              </a:defRPr>
+            </a:lvl3pPr>
+            <a:lvl4pPr marL="405734" indent="-202867" algn="l" defTabSz="202867" rtl="0" eaLnBrk="1" latinLnBrk="0" hangingPunct="1">
+              <a:spcBef>
+                <a:spcPts val="0"/>
+              </a:spcBef>
+              <a:buFont typeface="Arial" pitchFamily="34" charset="0"/>
+              <a:buChar char="–"/>
+              <a:tabLst>
+                <a:tab pos="202867" algn="l"/>
+              </a:tabLst>
+              <a:defRPr sz="1503" kern="1200">
+                <a:solidFill>
+                  <a:schemeClr val="tx1"/>
+                </a:solidFill>
+                <a:latin typeface="Arial" pitchFamily="34" charset="0"/>
+                <a:ea typeface="+mn-ea"/>
+                <a:cs typeface="Arial" pitchFamily="34" charset="0"/>
+              </a:defRPr>
+            </a:lvl4pPr>
+            <a:lvl5pPr marL="608602" indent="-202867" algn="l" defTabSz="202867" rtl="0" eaLnBrk="1" latinLnBrk="0" hangingPunct="1">
+              <a:spcBef>
+                <a:spcPts val="0"/>
+              </a:spcBef>
+              <a:buFont typeface="Arial" pitchFamily="34" charset="0"/>
+              <a:buChar char="»"/>
+              <a:tabLst>
+                <a:tab pos="202867" algn="l"/>
+              </a:tabLst>
+              <a:defRPr sz="1503" kern="1200">
+                <a:solidFill>
+                  <a:schemeClr val="tx1"/>
+                </a:solidFill>
+                <a:latin typeface="Arial" pitchFamily="34" charset="0"/>
+                <a:ea typeface="+mn-ea"/>
+                <a:cs typeface="Arial" pitchFamily="34" charset="0"/>
+              </a:defRPr>
+            </a:lvl5pPr>
+            <a:lvl6pPr marL="5393442" indent="-490313" algn="l" defTabSz="1961252" rtl="0" eaLnBrk="1" latinLnBrk="0" hangingPunct="1">
+              <a:spcBef>
+                <a:spcPct val="20000"/>
+              </a:spcBef>
+              <a:buFont typeface="Arial" pitchFamily="34" charset="0"/>
+              <a:buChar char="•"/>
+              <a:defRPr sz="4273" kern="1200">
+                <a:solidFill>
+                  <a:schemeClr val="tx1"/>
+                </a:solidFill>
+                <a:latin typeface="+mn-lt"/>
+                <a:ea typeface="+mn-ea"/>
+                <a:cs typeface="+mn-cs"/>
+              </a:defRPr>
+            </a:lvl6pPr>
+            <a:lvl7pPr marL="6374068" indent="-490313" algn="l" defTabSz="1961252" rtl="0" eaLnBrk="1" latinLnBrk="0" hangingPunct="1">
+              <a:spcBef>
+                <a:spcPct val="20000"/>
+              </a:spcBef>
+              <a:buFont typeface="Arial" pitchFamily="34" charset="0"/>
+              <a:buChar char="•"/>
+              <a:defRPr sz="4273" kern="1200">
+                <a:solidFill>
+                  <a:schemeClr val="tx1"/>
+                </a:solidFill>
+                <a:latin typeface="+mn-lt"/>
+                <a:ea typeface="+mn-ea"/>
+                <a:cs typeface="+mn-cs"/>
+              </a:defRPr>
+            </a:lvl7pPr>
+            <a:lvl8pPr marL="7354694" indent="-490313" algn="l" defTabSz="1961252" rtl="0" eaLnBrk="1" latinLnBrk="0" hangingPunct="1">
+              <a:spcBef>
+                <a:spcPct val="20000"/>
+              </a:spcBef>
+              <a:buFont typeface="Arial" pitchFamily="34" charset="0"/>
+              <a:buChar char="•"/>
+              <a:defRPr sz="4273" kern="1200">
+                <a:solidFill>
+                  <a:schemeClr val="tx1"/>
+                </a:solidFill>
+                <a:latin typeface="+mn-lt"/>
+                <a:ea typeface="+mn-ea"/>
+                <a:cs typeface="+mn-cs"/>
+              </a:defRPr>
+            </a:lvl8pPr>
+            <a:lvl9pPr marL="8335320" indent="-490313" algn="l" defTabSz="1961252" rtl="0" eaLnBrk="1" latinLnBrk="0" hangingPunct="1">
+              <a:spcBef>
+                <a:spcPct val="20000"/>
+              </a:spcBef>
+              <a:buFont typeface="Arial" pitchFamily="34" charset="0"/>
+              <a:buChar char="•"/>
+              <a:defRPr sz="4273" kern="1200">
+                <a:solidFill>
+                  <a:schemeClr val="tx1"/>
+                </a:solidFill>
+                <a:latin typeface="+mn-lt"/>
+                <a:ea typeface="+mn-ea"/>
+                <a:cs typeface="+mn-cs"/>
+              </a:defRPr>
+            </a:lvl9pPr>
+          </a:lstStyle>
+          <a:p>
+            <a:pPr lvl="1"/>
+            <a:r>
+              <a:rPr lang="nl-BE" dirty="0"/>
+              <a:t>Is een netwerkemulatiesoftware dat het mogelijk maakt om </a:t>
+            </a:r>
+            <a:r>
+              <a:rPr lang="nl-BE" dirty="0" err="1"/>
+              <a:t>netwerktopologieën</a:t>
+            </a:r>
+            <a:r>
+              <a:rPr lang="nl-BE" dirty="0"/>
+              <a:t> te ontwerpen en testen in een virtuele omgeving. EVE-NG draait virtuele netwerktoestellen als software “images” op een server. </a:t>
+            </a:r>
+          </a:p>
+        </p:txBody>
+      </p:sp>
     </p:spTree>
     <p:extLst>
       <p:ext uri="{BB962C8B-B14F-4D97-AF65-F5344CB8AC3E}">
@@ -3072,9 +3480,12 @@
 </file>
 
 <file path=customXml/item1.xml><?xml version="1.0" encoding="utf-8"?>
-<p:properties xmlns:p="http://schemas.microsoft.com/office/2006/metadata/properties" xmlns:xsi="http://www.w3.org/2001/XMLSchema-instance" xmlns:pc="http://schemas.microsoft.com/office/infopath/2007/PartnerControls">
-  <documentManagement/>
-</p:properties>
+<?mso-contentType ?>
+<FormTemplates xmlns="http://schemas.microsoft.com/sharepoint/v3/contenttype/forms">
+  <Display>DocumentLibraryForm</Display>
+  <Edit>DocumentLibraryForm</Edit>
+  <New>DocumentLibraryForm</New>
+</FormTemplates>
 </file>
 
 <file path=customXml/item2.xml><?xml version="1.0" encoding="utf-8"?>
@@ -3260,26 +3671,15 @@
 </file>
 
 <file path=customXml/item3.xml><?xml version="1.0" encoding="utf-8"?>
-<?mso-contentType ?>
-<FormTemplates xmlns="http://schemas.microsoft.com/sharepoint/v3/contenttype/forms">
-  <Display>DocumentLibraryForm</Display>
-  <Edit>DocumentLibraryForm</Edit>
-  <New>DocumentLibraryForm</New>
-</FormTemplates>
+<p:properties xmlns:p="http://schemas.microsoft.com/office/2006/metadata/properties" xmlns:xsi="http://www.w3.org/2001/XMLSchema-instance" xmlns:pc="http://schemas.microsoft.com/office/infopath/2007/PartnerControls">
+  <documentManagement/>
+</p:properties>
 </file>
 
 <file path=customXml/itemProps1.xml><?xml version="1.0" encoding="utf-8"?>
-<ds:datastoreItem xmlns:ds="http://schemas.openxmlformats.org/officeDocument/2006/customXml" ds:itemID="{2DE7141F-FBCE-4A78-9588-4D54994EB7FA}">
+<ds:datastoreItem xmlns:ds="http://schemas.openxmlformats.org/officeDocument/2006/customXml" ds:itemID="{DB4C8F74-1D82-4571-8BB4-C4A1A1557DE1}">
   <ds:schemaRefs>
-    <ds:schemaRef ds:uri="http://schemas.microsoft.com/office/2006/metadata/properties"/>
-    <ds:schemaRef ds:uri="http://schemas.microsoft.com/office/2006/documentManagement/types"/>
-    <ds:schemaRef ds:uri="http://purl.org/dc/elements/1.1/"/>
-    <ds:schemaRef ds:uri="http://purl.org/dc/dcmitype/"/>
-    <ds:schemaRef ds:uri="08656f9a-5533-445c-9745-8b78b9f32e94"/>
-    <ds:schemaRef ds:uri="http://schemas.microsoft.com/office/infopath/2007/PartnerControls"/>
-    <ds:schemaRef ds:uri="http://schemas.openxmlformats.org/package/2006/metadata/core-properties"/>
-    <ds:schemaRef ds:uri="http://www.w3.org/XML/1998/namespace"/>
-    <ds:schemaRef ds:uri="http://purl.org/dc/terms/"/>
+    <ds:schemaRef ds:uri="http://schemas.microsoft.com/sharepoint/v3/contenttype/forms"/>
   </ds:schemaRefs>
 </ds:datastoreItem>
 </file>
@@ -3303,9 +3703,17 @@
 </file>
 
 <file path=customXml/itemProps3.xml><?xml version="1.0" encoding="utf-8"?>
-<ds:datastoreItem xmlns:ds="http://schemas.openxmlformats.org/officeDocument/2006/customXml" ds:itemID="{DB4C8F74-1D82-4571-8BB4-C4A1A1557DE1}">
+<ds:datastoreItem xmlns:ds="http://schemas.openxmlformats.org/officeDocument/2006/customXml" ds:itemID="{2DE7141F-FBCE-4A78-9588-4D54994EB7FA}">
   <ds:schemaRefs>
-    <ds:schemaRef ds:uri="http://schemas.microsoft.com/sharepoint/v3/contenttype/forms"/>
+    <ds:schemaRef ds:uri="http://schemas.microsoft.com/office/2006/metadata/properties"/>
+    <ds:schemaRef ds:uri="http://schemas.microsoft.com/office/2006/documentManagement/types"/>
+    <ds:schemaRef ds:uri="http://purl.org/dc/elements/1.1/"/>
+    <ds:schemaRef ds:uri="http://purl.org/dc/dcmitype/"/>
+    <ds:schemaRef ds:uri="08656f9a-5533-445c-9745-8b78b9f32e94"/>
+    <ds:schemaRef ds:uri="http://schemas.microsoft.com/office/infopath/2007/PartnerControls"/>
+    <ds:schemaRef ds:uri="http://schemas.openxmlformats.org/package/2006/metadata/core-properties"/>
+    <ds:schemaRef ds:uri="http://www.w3.org/XML/1998/namespace"/>
+    <ds:schemaRef ds:uri="http://purl.org/dc/terms/"/>
   </ds:schemaRefs>
 </ds:datastoreItem>
 </file>
--- a/Poster/Poster.pptx
+++ b/Poster/Poster.pptx
@@ -2055,9 +2055,10 @@
           <a:lstStyle/>
           <a:p>
             <a:r>
-              <a:rPr lang="nl-BE" noProof="0" dirty="0"/>
-              <a:t>titel</a:t>
-            </a:r>
+              <a:rPr lang="nl-BE" b="0" cap="none" dirty="0"/>
+              <a:t>Voordelen</a:t>
+            </a:r>
+            <a:endParaRPr lang="nl-BE" b="0" cap="none" noProof="0" dirty="0"/>
           </a:p>
         </p:txBody>
       </p:sp>
@@ -3141,6 +3142,442 @@
             <a:r>
               <a:rPr lang="nl-BE" dirty="0"/>
               <a:t> te ontwerpen en testen in een virtuele omgeving. EVE-NG draait virtuele netwerktoestellen als software “images” op een server. </a:t>
+            </a:r>
+          </a:p>
+        </p:txBody>
+      </p:sp>
+      <p:pic>
+        <p:nvPicPr>
+          <p:cNvPr id="12" name="Picture 11">
+            <a:extLst>
+              <a:ext uri="{FF2B5EF4-FFF2-40B4-BE49-F238E27FC236}">
+                <a16:creationId xmlns:a16="http://schemas.microsoft.com/office/drawing/2014/main" id="{17894FF3-3F74-15C2-36ED-224D772E10D1}"/>
+              </a:ext>
+            </a:extLst>
+          </p:cNvPr>
+          <p:cNvPicPr>
+            <a:picLocks noChangeAspect="1"/>
+          </p:cNvPicPr>
+          <p:nvPr/>
+        </p:nvPicPr>
+        <p:blipFill>
+          <a:blip r:embed="rId6">
+            <a:extLst>
+              <a:ext uri="{28A0092B-C50C-407E-A947-70E740481C1C}">
+                <a14:useLocalDpi xmlns:a14="http://schemas.microsoft.com/office/drawing/2010/main" val="0"/>
+              </a:ext>
+            </a:extLst>
+          </a:blip>
+          <a:stretch>
+            <a:fillRect/>
+          </a:stretch>
+        </p:blipFill>
+        <p:spPr>
+          <a:xfrm>
+            <a:off x="6295509" y="14211743"/>
+            <a:ext cx="7248525" cy="962025"/>
+          </a:xfrm>
+          <a:prstGeom prst="rect">
+            <a:avLst/>
+          </a:prstGeom>
+        </p:spPr>
+      </p:pic>
+      <p:sp>
+        <p:nvSpPr>
+          <p:cNvPr id="13" name="Text Placeholder 10">
+            <a:extLst>
+              <a:ext uri="{FF2B5EF4-FFF2-40B4-BE49-F238E27FC236}">
+                <a16:creationId xmlns:a16="http://schemas.microsoft.com/office/drawing/2014/main" id="{41C970F1-F55A-3D7F-333F-B47B50970E9A}"/>
+              </a:ext>
+            </a:extLst>
+          </p:cNvPr>
+          <p:cNvSpPr txBox="1">
+            <a:spLocks/>
+          </p:cNvSpPr>
+          <p:nvPr/>
+        </p:nvSpPr>
+        <p:spPr>
+          <a:xfrm>
+            <a:off x="676438" y="14039535"/>
+            <a:ext cx="4175008" cy="338132"/>
+          </a:xfrm>
+          <a:prstGeom prst="round2SameRect">
+            <a:avLst/>
+          </a:prstGeom>
+          <a:solidFill>
+            <a:schemeClr val="tx2">
+              <a:lumMod val="60000"/>
+              <a:lumOff val="40000"/>
+            </a:schemeClr>
+          </a:solidFill>
+          <a:ln w="19050">
+            <a:solidFill>
+              <a:srgbClr val="00283C"/>
+            </a:solidFill>
+          </a:ln>
+        </p:spPr>
+        <p:txBody>
+          <a:bodyPr vert="horz" lIns="360000" tIns="0" rIns="360000" bIns="0" rtlCol="0" anchor="ctr" anchorCtr="0">
+            <a:noAutofit/>
+          </a:bodyPr>
+          <a:lstStyle>
+            <a:lvl1pPr marL="0" indent="0" algn="l" defTabSz="202867" rtl="0" eaLnBrk="1" latinLnBrk="0" hangingPunct="1">
+              <a:lnSpc>
+                <a:spcPct val="100000"/>
+              </a:lnSpc>
+              <a:spcBef>
+                <a:spcPts val="0"/>
+              </a:spcBef>
+              <a:spcAft>
+                <a:spcPts val="564"/>
+              </a:spcAft>
+              <a:buFontTx/>
+              <a:buNone/>
+              <a:tabLst>
+                <a:tab pos="202867" algn="l"/>
+              </a:tabLst>
+              <a:defRPr sz="1503" b="1" kern="1200" cap="all" baseline="0">
+                <a:solidFill>
+                  <a:schemeClr val="bg1"/>
+                </a:solidFill>
+                <a:latin typeface="Arial" pitchFamily="34" charset="0"/>
+                <a:ea typeface="+mn-ea"/>
+                <a:cs typeface="Arial" pitchFamily="34" charset="0"/>
+              </a:defRPr>
+            </a:lvl1pPr>
+            <a:lvl2pPr marL="0" indent="0" algn="l" defTabSz="202867" rtl="0" eaLnBrk="1" latinLnBrk="0" hangingPunct="1">
+              <a:spcBef>
+                <a:spcPts val="0"/>
+              </a:spcBef>
+              <a:buFont typeface="Arial" pitchFamily="34" charset="0"/>
+              <a:buNone/>
+              <a:tabLst>
+                <a:tab pos="202867" algn="l"/>
+              </a:tabLst>
+              <a:defRPr sz="1503" kern="1200">
+                <a:solidFill>
+                  <a:schemeClr val="tx1"/>
+                </a:solidFill>
+                <a:latin typeface="Arial" pitchFamily="34" charset="0"/>
+                <a:ea typeface="+mn-ea"/>
+                <a:cs typeface="Arial" pitchFamily="34" charset="0"/>
+              </a:defRPr>
+            </a:lvl2pPr>
+            <a:lvl3pPr marL="202867" indent="-202867" algn="l" defTabSz="202867" rtl="0" eaLnBrk="1" latinLnBrk="0" hangingPunct="1">
+              <a:spcBef>
+                <a:spcPts val="0"/>
+              </a:spcBef>
+              <a:buFont typeface="Arial" pitchFamily="34" charset="0"/>
+              <a:buChar char="•"/>
+              <a:tabLst>
+                <a:tab pos="202867" algn="l"/>
+              </a:tabLst>
+              <a:defRPr sz="1503" kern="1200">
+                <a:solidFill>
+                  <a:schemeClr val="tx1"/>
+                </a:solidFill>
+                <a:latin typeface="Arial" pitchFamily="34" charset="0"/>
+                <a:ea typeface="+mn-ea"/>
+                <a:cs typeface="Arial" pitchFamily="34" charset="0"/>
+              </a:defRPr>
+            </a:lvl3pPr>
+            <a:lvl4pPr marL="405734" indent="-202867" algn="l" defTabSz="202867" rtl="0" eaLnBrk="1" latinLnBrk="0" hangingPunct="1">
+              <a:spcBef>
+                <a:spcPts val="0"/>
+              </a:spcBef>
+              <a:buFont typeface="Arial" pitchFamily="34" charset="0"/>
+              <a:buChar char="–"/>
+              <a:tabLst>
+                <a:tab pos="202867" algn="l"/>
+              </a:tabLst>
+              <a:defRPr sz="1503" kern="1200">
+                <a:solidFill>
+                  <a:schemeClr val="tx1"/>
+                </a:solidFill>
+                <a:latin typeface="Arial" pitchFamily="34" charset="0"/>
+                <a:ea typeface="+mn-ea"/>
+                <a:cs typeface="Arial" pitchFamily="34" charset="0"/>
+              </a:defRPr>
+            </a:lvl4pPr>
+            <a:lvl5pPr marL="608602" indent="-202867" algn="l" defTabSz="202867" rtl="0" eaLnBrk="1" latinLnBrk="0" hangingPunct="1">
+              <a:spcBef>
+                <a:spcPts val="0"/>
+              </a:spcBef>
+              <a:buFont typeface="Arial" pitchFamily="34" charset="0"/>
+              <a:buChar char="»"/>
+              <a:tabLst>
+                <a:tab pos="202867" algn="l"/>
+              </a:tabLst>
+              <a:defRPr sz="1503" kern="1200">
+                <a:solidFill>
+                  <a:schemeClr val="tx1"/>
+                </a:solidFill>
+                <a:latin typeface="Arial" pitchFamily="34" charset="0"/>
+                <a:ea typeface="+mn-ea"/>
+                <a:cs typeface="Arial" pitchFamily="34" charset="0"/>
+              </a:defRPr>
+            </a:lvl5pPr>
+            <a:lvl6pPr marL="5393442" indent="-490313" algn="l" defTabSz="1961252" rtl="0" eaLnBrk="1" latinLnBrk="0" hangingPunct="1">
+              <a:spcBef>
+                <a:spcPct val="20000"/>
+              </a:spcBef>
+              <a:buFont typeface="Arial" pitchFamily="34" charset="0"/>
+              <a:buChar char="•"/>
+              <a:defRPr sz="4273" kern="1200">
+                <a:solidFill>
+                  <a:schemeClr val="tx1"/>
+                </a:solidFill>
+                <a:latin typeface="+mn-lt"/>
+                <a:ea typeface="+mn-ea"/>
+                <a:cs typeface="+mn-cs"/>
+              </a:defRPr>
+            </a:lvl6pPr>
+            <a:lvl7pPr marL="6374068" indent="-490313" algn="l" defTabSz="1961252" rtl="0" eaLnBrk="1" latinLnBrk="0" hangingPunct="1">
+              <a:spcBef>
+                <a:spcPct val="20000"/>
+              </a:spcBef>
+              <a:buFont typeface="Arial" pitchFamily="34" charset="0"/>
+              <a:buChar char="•"/>
+              <a:defRPr sz="4273" kern="1200">
+                <a:solidFill>
+                  <a:schemeClr val="tx1"/>
+                </a:solidFill>
+                <a:latin typeface="+mn-lt"/>
+                <a:ea typeface="+mn-ea"/>
+                <a:cs typeface="+mn-cs"/>
+              </a:defRPr>
+            </a:lvl7pPr>
+            <a:lvl8pPr marL="7354694" indent="-490313" algn="l" defTabSz="1961252" rtl="0" eaLnBrk="1" latinLnBrk="0" hangingPunct="1">
+              <a:spcBef>
+                <a:spcPct val="20000"/>
+              </a:spcBef>
+              <a:buFont typeface="Arial" pitchFamily="34" charset="0"/>
+              <a:buChar char="•"/>
+              <a:defRPr sz="4273" kern="1200">
+                <a:solidFill>
+                  <a:schemeClr val="tx1"/>
+                </a:solidFill>
+                <a:latin typeface="+mn-lt"/>
+                <a:ea typeface="+mn-ea"/>
+                <a:cs typeface="+mn-cs"/>
+              </a:defRPr>
+            </a:lvl8pPr>
+            <a:lvl9pPr marL="8335320" indent="-490313" algn="l" defTabSz="1961252" rtl="0" eaLnBrk="1" latinLnBrk="0" hangingPunct="1">
+              <a:spcBef>
+                <a:spcPct val="20000"/>
+              </a:spcBef>
+              <a:buFont typeface="Arial" pitchFamily="34" charset="0"/>
+              <a:buChar char="•"/>
+              <a:defRPr sz="4273" kern="1200">
+                <a:solidFill>
+                  <a:schemeClr val="tx1"/>
+                </a:solidFill>
+                <a:latin typeface="+mn-lt"/>
+                <a:ea typeface="+mn-ea"/>
+                <a:cs typeface="+mn-cs"/>
+              </a:defRPr>
+            </a:lvl9pPr>
+          </a:lstStyle>
+          <a:p>
+            <a:r>
+              <a:rPr lang="nl-BE" b="0" cap="none" dirty="0"/>
+              <a:t>Automatisering  </a:t>
+            </a:r>
+          </a:p>
+        </p:txBody>
+      </p:sp>
+      <p:sp>
+        <p:nvSpPr>
+          <p:cNvPr id="20" name="Text Placeholder 9">
+            <a:extLst>
+              <a:ext uri="{FF2B5EF4-FFF2-40B4-BE49-F238E27FC236}">
+                <a16:creationId xmlns:a16="http://schemas.microsoft.com/office/drawing/2014/main" id="{A08424EC-97A1-4BEB-8064-CAECB230DB73}"/>
+              </a:ext>
+            </a:extLst>
+          </p:cNvPr>
+          <p:cNvSpPr txBox="1">
+            <a:spLocks/>
+          </p:cNvSpPr>
+          <p:nvPr/>
+        </p:nvSpPr>
+        <p:spPr>
+          <a:xfrm>
+            <a:off x="676438" y="14375410"/>
+            <a:ext cx="4175008" cy="1506750"/>
+          </a:xfrm>
+          <a:prstGeom prst="rect">
+            <a:avLst/>
+          </a:prstGeom>
+          <a:ln w="19050">
+            <a:solidFill>
+              <a:srgbClr val="00283C"/>
+            </a:solidFill>
+          </a:ln>
+        </p:spPr>
+        <p:txBody>
+          <a:bodyPr vert="horz" wrap="square" lIns="360000" tIns="288000" rIns="360000" bIns="288000" rtlCol="0">
+            <a:spAutoFit/>
+          </a:bodyPr>
+          <a:lstStyle>
+            <a:lvl1pPr marL="0" indent="0" algn="l" defTabSz="202867" rtl="0" eaLnBrk="1" latinLnBrk="0" hangingPunct="1">
+              <a:spcBef>
+                <a:spcPts val="0"/>
+              </a:spcBef>
+              <a:spcAft>
+                <a:spcPts val="564"/>
+              </a:spcAft>
+              <a:buFont typeface="Arial" pitchFamily="34" charset="0"/>
+              <a:buNone/>
+              <a:tabLst>
+                <a:tab pos="202867" algn="l"/>
+              </a:tabLst>
+              <a:defRPr sz="1503" b="1" kern="1200" cap="all" baseline="0">
+                <a:solidFill>
+                  <a:srgbClr val="FA6432"/>
+                </a:solidFill>
+                <a:latin typeface="Arial" pitchFamily="34" charset="0"/>
+                <a:ea typeface="+mn-ea"/>
+                <a:cs typeface="Arial" pitchFamily="34" charset="0"/>
+              </a:defRPr>
+            </a:lvl1pPr>
+            <a:lvl2pPr marL="0" indent="-202867" algn="l" defTabSz="202867" rtl="0" eaLnBrk="1" latinLnBrk="0" hangingPunct="1">
+              <a:spcBef>
+                <a:spcPts val="0"/>
+              </a:spcBef>
+              <a:buFont typeface="Arial" pitchFamily="34" charset="0"/>
+              <a:buNone/>
+              <a:tabLst>
+                <a:tab pos="202867" algn="l"/>
+              </a:tabLst>
+              <a:defRPr lang="nl-NL" sz="1503" kern="1200" dirty="0" smtClean="0">
+                <a:solidFill>
+                  <a:schemeClr val="tx1"/>
+                </a:solidFill>
+                <a:latin typeface="Arial" pitchFamily="34" charset="0"/>
+                <a:ea typeface="+mn-ea"/>
+                <a:cs typeface="Arial" pitchFamily="34" charset="0"/>
+              </a:defRPr>
+            </a:lvl2pPr>
+            <a:lvl3pPr marL="202867" indent="-202867" algn="l" defTabSz="202867" rtl="0" eaLnBrk="1" latinLnBrk="0" hangingPunct="1">
+              <a:spcBef>
+                <a:spcPts val="0"/>
+              </a:spcBef>
+              <a:buFont typeface="Arial" pitchFamily="34" charset="0"/>
+              <a:buChar char="•"/>
+              <a:tabLst>
+                <a:tab pos="202867" algn="l"/>
+              </a:tabLst>
+              <a:defRPr sz="1503" kern="1200">
+                <a:solidFill>
+                  <a:schemeClr val="tx1"/>
+                </a:solidFill>
+                <a:latin typeface="Arial" pitchFamily="34" charset="0"/>
+                <a:ea typeface="+mn-ea"/>
+                <a:cs typeface="Arial" pitchFamily="34" charset="0"/>
+              </a:defRPr>
+            </a:lvl3pPr>
+            <a:lvl4pPr marL="405734" indent="-202867" algn="l" defTabSz="202867" rtl="0" eaLnBrk="1" latinLnBrk="0" hangingPunct="1">
+              <a:spcBef>
+                <a:spcPts val="0"/>
+              </a:spcBef>
+              <a:buFont typeface="Arial" pitchFamily="34" charset="0"/>
+              <a:buChar char="–"/>
+              <a:tabLst>
+                <a:tab pos="202867" algn="l"/>
+              </a:tabLst>
+              <a:defRPr sz="1503" kern="1200">
+                <a:solidFill>
+                  <a:schemeClr val="tx1"/>
+                </a:solidFill>
+                <a:latin typeface="Arial" pitchFamily="34" charset="0"/>
+                <a:ea typeface="+mn-ea"/>
+                <a:cs typeface="Arial" pitchFamily="34" charset="0"/>
+              </a:defRPr>
+            </a:lvl4pPr>
+            <a:lvl5pPr marL="608602" indent="-202867" algn="l" defTabSz="202867" rtl="0" eaLnBrk="1" latinLnBrk="0" hangingPunct="1">
+              <a:spcBef>
+                <a:spcPts val="0"/>
+              </a:spcBef>
+              <a:buFont typeface="Arial" pitchFamily="34" charset="0"/>
+              <a:buChar char="»"/>
+              <a:tabLst>
+                <a:tab pos="202867" algn="l"/>
+              </a:tabLst>
+              <a:defRPr sz="1503" kern="1200">
+                <a:solidFill>
+                  <a:schemeClr val="tx1"/>
+                </a:solidFill>
+                <a:latin typeface="Arial" pitchFamily="34" charset="0"/>
+                <a:ea typeface="+mn-ea"/>
+                <a:cs typeface="Arial" pitchFamily="34" charset="0"/>
+              </a:defRPr>
+            </a:lvl5pPr>
+            <a:lvl6pPr marL="5393442" indent="-490313" algn="l" defTabSz="1961252" rtl="0" eaLnBrk="1" latinLnBrk="0" hangingPunct="1">
+              <a:spcBef>
+                <a:spcPct val="20000"/>
+              </a:spcBef>
+              <a:buFont typeface="Arial" pitchFamily="34" charset="0"/>
+              <a:buChar char="•"/>
+              <a:defRPr sz="4273" kern="1200">
+                <a:solidFill>
+                  <a:schemeClr val="tx1"/>
+                </a:solidFill>
+                <a:latin typeface="+mn-lt"/>
+                <a:ea typeface="+mn-ea"/>
+                <a:cs typeface="+mn-cs"/>
+              </a:defRPr>
+            </a:lvl6pPr>
+            <a:lvl7pPr marL="6374068" indent="-490313" algn="l" defTabSz="1961252" rtl="0" eaLnBrk="1" latinLnBrk="0" hangingPunct="1">
+              <a:spcBef>
+                <a:spcPct val="20000"/>
+              </a:spcBef>
+              <a:buFont typeface="Arial" pitchFamily="34" charset="0"/>
+              <a:buChar char="•"/>
+              <a:defRPr sz="4273" kern="1200">
+                <a:solidFill>
+                  <a:schemeClr val="tx1"/>
+                </a:solidFill>
+                <a:latin typeface="+mn-lt"/>
+                <a:ea typeface="+mn-ea"/>
+                <a:cs typeface="+mn-cs"/>
+              </a:defRPr>
+            </a:lvl7pPr>
+            <a:lvl8pPr marL="7354694" indent="-490313" algn="l" defTabSz="1961252" rtl="0" eaLnBrk="1" latinLnBrk="0" hangingPunct="1">
+              <a:spcBef>
+                <a:spcPct val="20000"/>
+              </a:spcBef>
+              <a:buFont typeface="Arial" pitchFamily="34" charset="0"/>
+              <a:buChar char="•"/>
+              <a:defRPr sz="4273" kern="1200">
+                <a:solidFill>
+                  <a:schemeClr val="tx1"/>
+                </a:solidFill>
+                <a:latin typeface="+mn-lt"/>
+                <a:ea typeface="+mn-ea"/>
+                <a:cs typeface="+mn-cs"/>
+              </a:defRPr>
+            </a:lvl8pPr>
+            <a:lvl9pPr marL="8335320" indent="-490313" algn="l" defTabSz="1961252" rtl="0" eaLnBrk="1" latinLnBrk="0" hangingPunct="1">
+              <a:spcBef>
+                <a:spcPct val="20000"/>
+              </a:spcBef>
+              <a:buFont typeface="Arial" pitchFamily="34" charset="0"/>
+              <a:buChar char="•"/>
+              <a:defRPr sz="4273" kern="1200">
+                <a:solidFill>
+                  <a:schemeClr val="tx1"/>
+                </a:solidFill>
+                <a:latin typeface="+mn-lt"/>
+                <a:ea typeface="+mn-ea"/>
+                <a:cs typeface="+mn-cs"/>
+              </a:defRPr>
+            </a:lvl9pPr>
+          </a:lstStyle>
+          <a:p>
+            <a:pPr lvl="1"/>
+            <a:r>
+              <a:rPr lang="nl-BE" dirty="0"/>
+              <a:t>De verschillende labo’s kunnen aan de hand van een Python script volledig van begin af aan worden aangemaakt op de EVE-NG server.</a:t>
             </a:r>
           </a:p>
         </p:txBody>

--- a/Poster/Poster.pptx
+++ b/Poster/Poster.pptx
@@ -1992,7 +1992,7 @@
         <p:spPr>
           <a:xfrm>
             <a:off x="678097" y="16727750"/>
-            <a:ext cx="12865940" cy="1275469"/>
+            <a:ext cx="12865940" cy="1044188"/>
           </a:xfrm>
           <a:ln>
             <a:solidFill>
@@ -2006,12 +2006,9 @@
           <a:p>
             <a:pPr lvl="1" algn="just"/>
             <a:r>
-              <a:rPr lang="nl-BE" noProof="0" dirty="0"/>
-              <a:t>tekst</a:t>
-            </a:r>
-          </a:p>
-          <a:p>
-            <a:pPr lvl="1"/>
+              <a:rPr lang="nl-BE" dirty="0"/>
+              <a:t>Het voordeel van deze oplossing is dat er nu een </a:t>
+            </a:r>
             <a:endParaRPr lang="nl-BE" noProof="0" dirty="0"/>
           </a:p>
           <a:p>
@@ -2668,42 +2665,6 @@
       </p:sp>
       <p:pic>
         <p:nvPicPr>
-          <p:cNvPr id="23" name="Picture 22">
-            <a:extLst>
-              <a:ext uri="{FF2B5EF4-FFF2-40B4-BE49-F238E27FC236}">
-                <a16:creationId xmlns:a16="http://schemas.microsoft.com/office/drawing/2014/main" id="{1899F172-C6B7-646F-0329-5857B50F5E37}"/>
-              </a:ext>
-            </a:extLst>
-          </p:cNvPr>
-          <p:cNvPicPr>
-            <a:picLocks noChangeAspect="1"/>
-          </p:cNvPicPr>
-          <p:nvPr/>
-        </p:nvPicPr>
-        <p:blipFill>
-          <a:blip r:embed="rId4">
-            <a:extLst>
-              <a:ext uri="{28A0092B-C50C-407E-A947-70E740481C1C}">
-                <a14:useLocalDpi xmlns:a14="http://schemas.microsoft.com/office/drawing/2010/main" val="0"/>
-              </a:ext>
-            </a:extLst>
-          </a:blip>
-          <a:stretch>
-            <a:fillRect/>
-          </a:stretch>
-        </p:blipFill>
-        <p:spPr>
-          <a:xfrm>
-            <a:off x="676438" y="7230262"/>
-            <a:ext cx="8081224" cy="5765817"/>
-          </a:xfrm>
-          <a:prstGeom prst="rect">
-            <a:avLst/>
-          </a:prstGeom>
-        </p:spPr>
-      </p:pic>
-      <p:pic>
-        <p:nvPicPr>
           <p:cNvPr id="25" name="Picture 24">
             <a:extLst>
               <a:ext uri="{FF2B5EF4-FFF2-40B4-BE49-F238E27FC236}">
@@ -2717,7 +2678,7 @@
           <p:nvPr/>
         </p:nvPicPr>
         <p:blipFill>
-          <a:blip r:embed="rId5">
+          <a:blip r:embed="rId4">
             <a:extLst>
               <a:ext uri="{28A0092B-C50C-407E-A947-70E740481C1C}">
                 <a14:useLocalDpi xmlns:a14="http://schemas.microsoft.com/office/drawing/2010/main" val="0"/>
@@ -3130,7 +3091,7 @@
             </a:lvl9pPr>
           </a:lstStyle>
           <a:p>
-            <a:pPr lvl="1"/>
+            <a:pPr lvl="1" algn="just"/>
             <a:r>
               <a:rPr lang="nl-BE" dirty="0"/>
               <a:t>Is een netwerkemulatiesoftware dat het mogelijk maakt om </a:t>
@@ -3146,42 +3107,6 @@
           </a:p>
         </p:txBody>
       </p:sp>
-      <p:pic>
-        <p:nvPicPr>
-          <p:cNvPr id="12" name="Picture 11">
-            <a:extLst>
-              <a:ext uri="{FF2B5EF4-FFF2-40B4-BE49-F238E27FC236}">
-                <a16:creationId xmlns:a16="http://schemas.microsoft.com/office/drawing/2014/main" id="{17894FF3-3F74-15C2-36ED-224D772E10D1}"/>
-              </a:ext>
-            </a:extLst>
-          </p:cNvPr>
-          <p:cNvPicPr>
-            <a:picLocks noChangeAspect="1"/>
-          </p:cNvPicPr>
-          <p:nvPr/>
-        </p:nvPicPr>
-        <p:blipFill>
-          <a:blip r:embed="rId6">
-            <a:extLst>
-              <a:ext uri="{28A0092B-C50C-407E-A947-70E740481C1C}">
-                <a14:useLocalDpi xmlns:a14="http://schemas.microsoft.com/office/drawing/2010/main" val="0"/>
-              </a:ext>
-            </a:extLst>
-          </a:blip>
-          <a:stretch>
-            <a:fillRect/>
-          </a:stretch>
-        </p:blipFill>
-        <p:spPr>
-          <a:xfrm>
-            <a:off x="6295509" y="14211743"/>
-            <a:ext cx="7248525" cy="962025"/>
-          </a:xfrm>
-          <a:prstGeom prst="rect">
-            <a:avLst/>
-          </a:prstGeom>
-        </p:spPr>
-      </p:pic>
       <p:sp>
         <p:nvSpPr>
           <p:cNvPr id="13" name="Text Placeholder 10">
@@ -3574,7 +3499,7 @@
             </a:lvl9pPr>
           </a:lstStyle>
           <a:p>
-            <a:pPr lvl="1"/>
+            <a:pPr lvl="1" algn="just"/>
             <a:r>
               <a:rPr lang="nl-BE" dirty="0"/>
               <a:t>De verschillende labo’s kunnen aan de hand van een Python script volledig van begin af aan worden aangemaakt op de EVE-NG server.</a:t>
@@ -3582,6 +3507,78 @@
           </a:p>
         </p:txBody>
       </p:sp>
+      <p:pic>
+        <p:nvPicPr>
+          <p:cNvPr id="17" name="Picture 16">
+            <a:extLst>
+              <a:ext uri="{FF2B5EF4-FFF2-40B4-BE49-F238E27FC236}">
+                <a16:creationId xmlns:a16="http://schemas.microsoft.com/office/drawing/2014/main" id="{8397D068-8406-1BC7-76A8-2A3BE224A29E}"/>
+              </a:ext>
+            </a:extLst>
+          </p:cNvPr>
+          <p:cNvPicPr>
+            <a:picLocks noChangeAspect="1"/>
+          </p:cNvPicPr>
+          <p:nvPr/>
+        </p:nvPicPr>
+        <p:blipFill>
+          <a:blip r:embed="rId5">
+            <a:extLst>
+              <a:ext uri="{28A0092B-C50C-407E-A947-70E740481C1C}">
+                <a14:useLocalDpi xmlns:a14="http://schemas.microsoft.com/office/drawing/2010/main" val="0"/>
+              </a:ext>
+            </a:extLst>
+          </a:blip>
+          <a:stretch>
+            <a:fillRect/>
+          </a:stretch>
+        </p:blipFill>
+        <p:spPr>
+          <a:xfrm>
+            <a:off x="6486009" y="14600147"/>
+            <a:ext cx="7058025" cy="1057275"/>
+          </a:xfrm>
+          <a:prstGeom prst="rect">
+            <a:avLst/>
+          </a:prstGeom>
+        </p:spPr>
+      </p:pic>
+      <p:pic>
+        <p:nvPicPr>
+          <p:cNvPr id="21" name="Picture 20">
+            <a:extLst>
+              <a:ext uri="{FF2B5EF4-FFF2-40B4-BE49-F238E27FC236}">
+                <a16:creationId xmlns:a16="http://schemas.microsoft.com/office/drawing/2014/main" id="{FB2482D3-652B-2BD8-BE5A-06F2A12B4C3A}"/>
+              </a:ext>
+            </a:extLst>
+          </p:cNvPr>
+          <p:cNvPicPr>
+            <a:picLocks noChangeAspect="1"/>
+          </p:cNvPicPr>
+          <p:nvPr/>
+        </p:nvPicPr>
+        <p:blipFill>
+          <a:blip r:embed="rId6">
+            <a:extLst>
+              <a:ext uri="{28A0092B-C50C-407E-A947-70E740481C1C}">
+                <a14:useLocalDpi xmlns:a14="http://schemas.microsoft.com/office/drawing/2010/main" val="0"/>
+              </a:ext>
+            </a:extLst>
+          </a:blip>
+          <a:stretch>
+            <a:fillRect/>
+          </a:stretch>
+        </p:blipFill>
+        <p:spPr>
+          <a:xfrm>
+            <a:off x="676438" y="7085161"/>
+            <a:ext cx="8616220" cy="6147528"/>
+          </a:xfrm>
+          <a:prstGeom prst="rect">
+            <a:avLst/>
+          </a:prstGeom>
+        </p:spPr>
+      </p:pic>
     </p:spTree>
     <p:extLst>
       <p:ext uri="{BB962C8B-B14F-4D97-AF65-F5344CB8AC3E}">

--- a/Poster/Poster.pptx
+++ b/Poster/Poster.pptx
@@ -2007,7 +2007,11 @@
             <a:pPr lvl="1" algn="just"/>
             <a:r>
               <a:rPr lang="nl-BE" dirty="0"/>
-              <a:t>Het voordeel van deze oplossing is dat er nu een </a:t>
+              <a:t>Het voordeel van de virtuele leer-en </a:t>
+            </a:r>
+            <a:r>
+              <a:rPr lang="nl-BE"/>
+              <a:t>testomgeving is dat </a:t>
             </a:r>
             <a:endParaRPr lang="nl-BE" noProof="0" dirty="0"/>
           </a:p>
@@ -2650,7 +2654,7 @@
             <a:pPr lvl="1" algn="just"/>
             <a:r>
               <a:rPr lang="nl-BE" noProof="0" dirty="0"/>
-              <a:t>Dankzij de virtuele leer-en testomgeving kunnen sollicitanten ook getoetst worden op hun praktische kennis. Hierdoor kan een beter beeld worden geschetst van hun vaardigheden. Ook kunnen de labo’s worden gebruikt door de </a:t>
+              <a:t>Dankzij de virtuele leer-en testomgeving kunnen sollicitanten getoetst worden op hun praktische kennis. Hierdoor kan een beter beeld worden geschetst van hun vaardigheden. Ook kunnen de labo’s worden gebruikt door de </a:t>
             </a:r>
             <a:r>
               <a:rPr lang="nl-BE" noProof="0" dirty="0" err="1"/>
@@ -2658,7 +2662,7 @@
             </a:r>
             <a:r>
               <a:rPr lang="nl-BE" noProof="0" dirty="0"/>
-              <a:t> om gewend te raken aan een realistische netwerktopologie</a:t>
+              <a:t> om te wennen aan een realistische netwerktopologie</a:t>
             </a:r>
           </a:p>
         </p:txBody>
@@ -3102,7 +3106,7 @@
             </a:r>
             <a:r>
               <a:rPr lang="nl-BE" dirty="0"/>
-              <a:t> te ontwerpen en testen in een virtuele omgeving. EVE-NG draait virtuele netwerktoestellen als software “images” op een server. </a:t>
+              <a:t> te ontwerpen en te testen in een virtuele omgeving. EVE-NG draait virtuele netwerktoestellen als software “images” op een server. </a:t>
             </a:r>
           </a:p>
         </p:txBody>
@@ -3502,7 +3506,7 @@
             <a:pPr lvl="1" algn="just"/>
             <a:r>
               <a:rPr lang="nl-BE" dirty="0"/>
-              <a:t>De verschillende labo’s kunnen aan de hand van een Python script volledig van begin af aan worden aangemaakt op de EVE-NG server.</a:t>
+              <a:t>De verschillende labo’s kunnen aan de hand van een Python script van begin af aan worden aangemaakt op de EVE-NG server.</a:t>
             </a:r>
           </a:p>
         </p:txBody>
@@ -3914,12 +3918,9 @@
 </file>
 
 <file path=customXml/item1.xml><?xml version="1.0" encoding="utf-8"?>
-<?mso-contentType ?>
-<FormTemplates xmlns="http://schemas.microsoft.com/sharepoint/v3/contenttype/forms">
-  <Display>DocumentLibraryForm</Display>
-  <Edit>DocumentLibraryForm</Edit>
-  <New>DocumentLibraryForm</New>
-</FormTemplates>
+<p:properties xmlns:p="http://schemas.microsoft.com/office/2006/metadata/properties" xmlns:xsi="http://www.w3.org/2001/XMLSchema-instance" xmlns:pc="http://schemas.microsoft.com/office/infopath/2007/PartnerControls">
+  <documentManagement/>
+</p:properties>
 </file>
 
 <file path=customXml/item2.xml><?xml version="1.0" encoding="utf-8"?>
@@ -4105,15 +4106,26 @@
 </file>
 
 <file path=customXml/item3.xml><?xml version="1.0" encoding="utf-8"?>
-<p:properties xmlns:p="http://schemas.microsoft.com/office/2006/metadata/properties" xmlns:xsi="http://www.w3.org/2001/XMLSchema-instance" xmlns:pc="http://schemas.microsoft.com/office/infopath/2007/PartnerControls">
-  <documentManagement/>
-</p:properties>
+<?mso-contentType ?>
+<FormTemplates xmlns="http://schemas.microsoft.com/sharepoint/v3/contenttype/forms">
+  <Display>DocumentLibraryForm</Display>
+  <Edit>DocumentLibraryForm</Edit>
+  <New>DocumentLibraryForm</New>
+</FormTemplates>
 </file>
 
 <file path=customXml/itemProps1.xml><?xml version="1.0" encoding="utf-8"?>
-<ds:datastoreItem xmlns:ds="http://schemas.openxmlformats.org/officeDocument/2006/customXml" ds:itemID="{DB4C8F74-1D82-4571-8BB4-C4A1A1557DE1}">
+<ds:datastoreItem xmlns:ds="http://schemas.openxmlformats.org/officeDocument/2006/customXml" ds:itemID="{2DE7141F-FBCE-4A78-9588-4D54994EB7FA}">
   <ds:schemaRefs>
-    <ds:schemaRef ds:uri="http://schemas.microsoft.com/sharepoint/v3/contenttype/forms"/>
+    <ds:schemaRef ds:uri="http://schemas.microsoft.com/office/2006/metadata/properties"/>
+    <ds:schemaRef ds:uri="http://schemas.microsoft.com/office/2006/documentManagement/types"/>
+    <ds:schemaRef ds:uri="http://purl.org/dc/elements/1.1/"/>
+    <ds:schemaRef ds:uri="http://purl.org/dc/dcmitype/"/>
+    <ds:schemaRef ds:uri="08656f9a-5533-445c-9745-8b78b9f32e94"/>
+    <ds:schemaRef ds:uri="http://schemas.microsoft.com/office/infopath/2007/PartnerControls"/>
+    <ds:schemaRef ds:uri="http://schemas.openxmlformats.org/package/2006/metadata/core-properties"/>
+    <ds:schemaRef ds:uri="http://www.w3.org/XML/1998/namespace"/>
+    <ds:schemaRef ds:uri="http://purl.org/dc/terms/"/>
   </ds:schemaRefs>
 </ds:datastoreItem>
 </file>
@@ -4137,17 +4149,9 @@
 </file>
 
 <file path=customXml/itemProps3.xml><?xml version="1.0" encoding="utf-8"?>
-<ds:datastoreItem xmlns:ds="http://schemas.openxmlformats.org/officeDocument/2006/customXml" ds:itemID="{2DE7141F-FBCE-4A78-9588-4D54994EB7FA}">
+<ds:datastoreItem xmlns:ds="http://schemas.openxmlformats.org/officeDocument/2006/customXml" ds:itemID="{DB4C8F74-1D82-4571-8BB4-C4A1A1557DE1}">
   <ds:schemaRefs>
-    <ds:schemaRef ds:uri="http://schemas.microsoft.com/office/2006/metadata/properties"/>
-    <ds:schemaRef ds:uri="http://schemas.microsoft.com/office/2006/documentManagement/types"/>
-    <ds:schemaRef ds:uri="http://purl.org/dc/elements/1.1/"/>
-    <ds:schemaRef ds:uri="http://purl.org/dc/dcmitype/"/>
-    <ds:schemaRef ds:uri="08656f9a-5533-445c-9745-8b78b9f32e94"/>
-    <ds:schemaRef ds:uri="http://schemas.microsoft.com/office/infopath/2007/PartnerControls"/>
-    <ds:schemaRef ds:uri="http://schemas.openxmlformats.org/package/2006/metadata/core-properties"/>
-    <ds:schemaRef ds:uri="http://www.w3.org/XML/1998/namespace"/>
-    <ds:schemaRef ds:uri="http://purl.org/dc/terms/"/>
+    <ds:schemaRef ds:uri="http://schemas.microsoft.com/sharepoint/v3/contenttype/forms"/>
   </ds:schemaRefs>
 </ds:datastoreItem>
 </file>
--- a/Poster/Poster.pptx
+++ b/Poster/Poster.pptx
@@ -1992,7 +1992,7 @@
         <p:spPr>
           <a:xfrm>
             <a:off x="678097" y="16727750"/>
-            <a:ext cx="12865940" cy="1044188"/>
+            <a:ext cx="12865940" cy="1275469"/>
           </a:xfrm>
           <a:ln>
             <a:solidFill>
@@ -2007,16 +2007,8 @@
             <a:pPr lvl="1" algn="just"/>
             <a:r>
               <a:rPr lang="nl-BE" dirty="0"/>
-              <a:t>Het voordeel van de virtuele leer-en </a:t>
-            </a:r>
-            <a:r>
-              <a:rPr lang="nl-BE"/>
-              <a:t>testomgeving is dat </a:t>
-            </a:r>
-            <a:endParaRPr lang="nl-BE" noProof="0" dirty="0"/>
-          </a:p>
-          <a:p>
-            <a:pPr lvl="1"/>
+              <a:t>Het voordeel van deze oplossing is dat er dankzij de virtuele leer-en testomgeving kennis kan worden getoetst over allerlei verschillende netwerkonderwerpen. De labo’s behandelen telkens andere onderwerpen en kunnen ook op verschillende manieren worden geconfigureerd, waardoor een correct beeld kan worden geschetst over de praktische kennis en inzichten van de sollicitant.</a:t>
+            </a:r>
             <a:endParaRPr lang="nl-BE" noProof="0" dirty="0"/>
           </a:p>
         </p:txBody>
@@ -3098,15 +3090,7 @@
             <a:pPr lvl="1" algn="just"/>
             <a:r>
               <a:rPr lang="nl-BE" dirty="0"/>
-              <a:t>Is een netwerkemulatiesoftware dat het mogelijk maakt om </a:t>
-            </a:r>
-            <a:r>
-              <a:rPr lang="nl-BE" dirty="0" err="1"/>
-              <a:t>netwerktopologieën</a:t>
-            </a:r>
-            <a:r>
-              <a:rPr lang="nl-BE" dirty="0"/>
-              <a:t> te ontwerpen en te testen in een virtuele omgeving. EVE-NG draait virtuele netwerktoestellen als software “images” op een server. </a:t>
+              <a:t>Is een netwerkemulatiesoftware dat het mogelijk maakt om netwerktopologieën te ontwerpen en te testen in een virtuele omgeving. EVE-NG draait netwerktoestellen als virtuele machines op een server</a:t>
             </a:r>
           </a:p>
         </p:txBody>
@@ -3924,6 +3908,15 @@
 </file>
 
 <file path=customXml/item2.xml><?xml version="1.0" encoding="utf-8"?>
+<?mso-contentType ?>
+<FormTemplates xmlns="http://schemas.microsoft.com/sharepoint/v3/contenttype/forms">
+  <Display>DocumentLibraryForm</Display>
+  <Edit>DocumentLibraryForm</Edit>
+  <New>DocumentLibraryForm</New>
+</FormTemplates>
+</file>
+
+<file path=customXml/item3.xml><?xml version="1.0" encoding="utf-8"?>
 <ct:contentTypeSchema xmlns:ct="http://schemas.microsoft.com/office/2006/metadata/contentType" xmlns:ma="http://schemas.microsoft.com/office/2006/metadata/properties/metaAttributes" ct:_="" ma:_="" ma:contentTypeName="Document" ma:contentTypeID="0x0101001A307FBA45E73B4C8D5201D6E93AE7FF" ma:contentTypeVersion="10" ma:contentTypeDescription="Een nieuw document maken." ma:contentTypeScope="" ma:versionID="ffc79c833aa11187a9b03609d0ef013b">
   <xsd:schema xmlns:xsd="http://www.w3.org/2001/XMLSchema" xmlns:xs="http://www.w3.org/2001/XMLSchema" xmlns:p="http://schemas.microsoft.com/office/2006/metadata/properties" xmlns:ns2="08656f9a-5533-445c-9745-8b78b9f32e94" targetNamespace="http://schemas.microsoft.com/office/2006/metadata/properties" ma:root="true" ma:fieldsID="f1de88abeb94c0a233512af3206a5add" ns2:_="">
     <xsd:import namespace="08656f9a-5533-445c-9745-8b78b9f32e94"/>
@@ -4105,15 +4098,6 @@
 </ct:contentTypeSchema>
 </file>
 
-<file path=customXml/item3.xml><?xml version="1.0" encoding="utf-8"?>
-<?mso-contentType ?>
-<FormTemplates xmlns="http://schemas.microsoft.com/sharepoint/v3/contenttype/forms">
-  <Display>DocumentLibraryForm</Display>
-  <Edit>DocumentLibraryForm</Edit>
-  <New>DocumentLibraryForm</New>
-</FormTemplates>
-</file>
-
 <file path=customXml/itemProps1.xml><?xml version="1.0" encoding="utf-8"?>
 <ds:datastoreItem xmlns:ds="http://schemas.openxmlformats.org/officeDocument/2006/customXml" ds:itemID="{2DE7141F-FBCE-4A78-9588-4D54994EB7FA}">
   <ds:schemaRefs>
@@ -4131,6 +4115,14 @@
 </file>
 
 <file path=customXml/itemProps2.xml><?xml version="1.0" encoding="utf-8"?>
+<ds:datastoreItem xmlns:ds="http://schemas.openxmlformats.org/officeDocument/2006/customXml" ds:itemID="{DB4C8F74-1D82-4571-8BB4-C4A1A1557DE1}">
+  <ds:schemaRefs>
+    <ds:schemaRef ds:uri="http://schemas.microsoft.com/sharepoint/v3/contenttype/forms"/>
+  </ds:schemaRefs>
+</ds:datastoreItem>
+</file>
+
+<file path=customXml/itemProps3.xml><?xml version="1.0" encoding="utf-8"?>
 <ds:datastoreItem xmlns:ds="http://schemas.openxmlformats.org/officeDocument/2006/customXml" ds:itemID="{0677BFE8-9222-4836-8D51-287619E2A1F6}">
   <ds:schemaRefs>
     <ds:schemaRef ds:uri="http://schemas.microsoft.com/office/2006/metadata/contentType"/>
@@ -4146,12 +4138,4 @@
     <ds:schemaRef ds:uri="http://schemas.microsoft.com/internal/obd"/>
   </ds:schemaRefs>
 </ds:datastoreItem>
-</file>
-
-<file path=customXml/itemProps3.xml><?xml version="1.0" encoding="utf-8"?>
-<ds:datastoreItem xmlns:ds="http://schemas.openxmlformats.org/officeDocument/2006/customXml" ds:itemID="{DB4C8F74-1D82-4571-8BB4-C4A1A1557DE1}">
-  <ds:schemaRefs>
-    <ds:schemaRef ds:uri="http://schemas.microsoft.com/sharepoint/v3/contenttype/forms"/>
-  </ds:schemaRefs>
-</ds:datastoreItem>
 </file>
--- a/Poster/Poster.pptx
+++ b/Poster/Poster.pptx
@@ -3087,7 +3087,7 @@
             </a:lvl9pPr>
           </a:lstStyle>
           <a:p>
-            <a:pPr lvl="1" algn="just"/>
+            <a:pPr lvl="1"/>
             <a:r>
               <a:rPr lang="nl-BE" dirty="0"/>
               <a:t>Is een netwerkemulatiesoftware dat het mogelijk maakt om netwerktopologieën te ontwerpen en te testen in een virtuele omgeving. EVE-NG draait netwerktoestellen als virtuele machines op een server</a:t>
@@ -3490,7 +3490,7 @@
             <a:pPr lvl="1" algn="just"/>
             <a:r>
               <a:rPr lang="nl-BE" dirty="0"/>
-              <a:t>De verschillende labo’s kunnen aan de hand van een Python script van begin af aan worden aangemaakt op de EVE-NG server.</a:t>
+              <a:t>De verschillende labo’s kunnen aan de hand van een Python script volledig worden aangemaakt op de EVE-NG server.</a:t>
             </a:r>
           </a:p>
         </p:txBody>
@@ -3908,15 +3908,6 @@
 </file>
 
 <file path=customXml/item2.xml><?xml version="1.0" encoding="utf-8"?>
-<?mso-contentType ?>
-<FormTemplates xmlns="http://schemas.microsoft.com/sharepoint/v3/contenttype/forms">
-  <Display>DocumentLibraryForm</Display>
-  <Edit>DocumentLibraryForm</Edit>
-  <New>DocumentLibraryForm</New>
-</FormTemplates>
-</file>
-
-<file path=customXml/item3.xml><?xml version="1.0" encoding="utf-8"?>
 <ct:contentTypeSchema xmlns:ct="http://schemas.microsoft.com/office/2006/metadata/contentType" xmlns:ma="http://schemas.microsoft.com/office/2006/metadata/properties/metaAttributes" ct:_="" ma:_="" ma:contentTypeName="Document" ma:contentTypeID="0x0101001A307FBA45E73B4C8D5201D6E93AE7FF" ma:contentTypeVersion="10" ma:contentTypeDescription="Een nieuw document maken." ma:contentTypeScope="" ma:versionID="ffc79c833aa11187a9b03609d0ef013b">
   <xsd:schema xmlns:xsd="http://www.w3.org/2001/XMLSchema" xmlns:xs="http://www.w3.org/2001/XMLSchema" xmlns:p="http://schemas.microsoft.com/office/2006/metadata/properties" xmlns:ns2="08656f9a-5533-445c-9745-8b78b9f32e94" targetNamespace="http://schemas.microsoft.com/office/2006/metadata/properties" ma:root="true" ma:fieldsID="f1de88abeb94c0a233512af3206a5add" ns2:_="">
     <xsd:import namespace="08656f9a-5533-445c-9745-8b78b9f32e94"/>
@@ -4098,6 +4089,15 @@
 </ct:contentTypeSchema>
 </file>
 
+<file path=customXml/item3.xml><?xml version="1.0" encoding="utf-8"?>
+<?mso-contentType ?>
+<FormTemplates xmlns="http://schemas.microsoft.com/sharepoint/v3/contenttype/forms">
+  <Display>DocumentLibraryForm</Display>
+  <Edit>DocumentLibraryForm</Edit>
+  <New>DocumentLibraryForm</New>
+</FormTemplates>
+</file>
+
 <file path=customXml/itemProps1.xml><?xml version="1.0" encoding="utf-8"?>
 <ds:datastoreItem xmlns:ds="http://schemas.openxmlformats.org/officeDocument/2006/customXml" ds:itemID="{2DE7141F-FBCE-4A78-9588-4D54994EB7FA}">
   <ds:schemaRefs>
@@ -4115,14 +4115,6 @@
 </file>
 
 <file path=customXml/itemProps2.xml><?xml version="1.0" encoding="utf-8"?>
-<ds:datastoreItem xmlns:ds="http://schemas.openxmlformats.org/officeDocument/2006/customXml" ds:itemID="{DB4C8F74-1D82-4571-8BB4-C4A1A1557DE1}">
-  <ds:schemaRefs>
-    <ds:schemaRef ds:uri="http://schemas.microsoft.com/sharepoint/v3/contenttype/forms"/>
-  </ds:schemaRefs>
-</ds:datastoreItem>
-</file>
-
-<file path=customXml/itemProps3.xml><?xml version="1.0" encoding="utf-8"?>
 <ds:datastoreItem xmlns:ds="http://schemas.openxmlformats.org/officeDocument/2006/customXml" ds:itemID="{0677BFE8-9222-4836-8D51-287619E2A1F6}">
   <ds:schemaRefs>
     <ds:schemaRef ds:uri="http://schemas.microsoft.com/office/2006/metadata/contentType"/>
@@ -4138,4 +4130,12 @@
     <ds:schemaRef ds:uri="http://schemas.microsoft.com/internal/obd"/>
   </ds:schemaRefs>
 </ds:datastoreItem>
+</file>
+
+<file path=customXml/itemProps3.xml><?xml version="1.0" encoding="utf-8"?>
+<ds:datastoreItem xmlns:ds="http://schemas.openxmlformats.org/officeDocument/2006/customXml" ds:itemID="{DB4C8F74-1D82-4571-8BB4-C4A1A1557DE1}">
+  <ds:schemaRefs>
+    <ds:schemaRef ds:uri="http://schemas.microsoft.com/sharepoint/v3/contenttype/forms"/>
+  </ds:schemaRefs>
+</ds:datastoreItem>
 </file>